--- a/docs/20260709_Research_Lifecycle_Guide_v7_JA.pptx
+++ b/docs/20260709_Research_Lifecycle_Guide_v7_JA.pptx
@@ -4646,7 +4646,7 @@
                 <a:ea typeface="Yu Gothic" pitchFamily="34" charset="-122"/>
                 <a:cs typeface="Yu Gothic" pitchFamily="34" charset="-120"/>
               </a:rPr>
-              <a:t>MUSASHINO UNIVERSITY  ─  FACULTY OF DATA SCIENCE</a:t>
+              <a:t>AIx{} Project  ─  浦木・高橋研究室</a:t>
             </a:r>
             <a:endParaRPr lang="en-US" sz="1200" dirty="0"/>
           </a:p>
@@ -44076,7 +44076,7 @@
               <a:buNone/>
             </a:pPr>
             <a:r>
-              <a:rPr lang="en-US" sz="1000" dirty="0">
+              <a:rPr lang="en-US" sz="950" dirty="0">
                 <a:solidFill>
                   <a:srgbClr val="8FB8C6"/>
                 </a:solidFill>
@@ -44084,9 +44084,9 @@
                 <a:ea typeface="Yu Gothic" pitchFamily="34" charset="-122"/>
                 <a:cs typeface="Yu Gothic" pitchFamily="34" charset="-120"/>
               </a:rPr>
-              <a:t>Acknowledgment：岡 宗一 教授（武蔵野大学 データサイエンス学部）／ 浦木メソッド（アブスト7文法・箱テンプレA/B・流し込みエディタ）に基づく</a:t>
-            </a:r>
-            <a:endParaRPr lang="en-US" sz="1000" dirty="0"/>
+              <a:t>Acknowledgment：岡 宗一 教授（武蔵野大学 DS学部）── 貴重なFBとアドバイス　／　浦木麻子 准教授（同）── 7文法・箱テンプレA/B・流し込みエディタ</a:t>
+            </a:r>
+            <a:endParaRPr lang="en-US" sz="950" dirty="0"/>
           </a:p>
         </p:txBody>
       </p:sp>
@@ -44123,7 +44123,7 @@
                 <a:ea typeface="Yu Gothic" pitchFamily="34" charset="-122"/>
                 <a:cs typeface="Yu Gothic" pitchFamily="34" charset="-120"/>
               </a:rPr>
-              <a:t>武蔵野大学 データサイエンス学部  ｜  研究ライフサイクル統合ガイド〔学習統合版〕  v7 / 2026-07-09 / JA</a:t>
+              <a:t>AIx{} Project 浦木・高橋研究室（武蔵野大学 データサイエンス学部）  ｜  研究ライフサイクル統合ガイド〔学習統合版〕  v7 / 2026-07-09 / JA</a:t>
             </a:r>
             <a:endParaRPr lang="en-US" sz="1000" dirty="0"/>
           </a:p>

--- a/docs/20260709_Research_Lifecycle_Guide_v7_JA.pptx
+++ b/docs/20260709_Research_Lifecycle_Guide_v7_JA.pptx
@@ -11631,7 +11631,7 @@
                 <a:ea typeface="Yu Gothic" pitchFamily="34" charset="-122"/>
                 <a:cs typeface="Yu Gothic" pitchFamily="34" charset="-120"/>
               </a:rPr>
-              <a:t>アブスト7文法（浦木）</a:t>
+              <a:t>アブスト7文法（浦木麻子准教授）</a:t>
             </a:r>
             <a:endParaRPr lang="en-US" sz="950" dirty="0"/>
           </a:p>
@@ -20653,7 +20653,7 @@
                 <a:ea typeface="Yu Gothic" pitchFamily="34" charset="-122"/>
                 <a:cs typeface="Yu Gothic" pitchFamily="34" charset="-120"/>
               </a:rPr>
-              <a:t>PART 3  ─  執筆型の決定（浦木メソッド）</a:t>
+              <a:t>PART 3  ─  執筆型の決定（浦木麻子 准教授 考案）</a:t>
             </a:r>
             <a:endParaRPr lang="en-US" sz="1200" dirty="0"/>
           </a:p>
@@ -21967,7 +21967,7 @@
                 <a:ea typeface="Yu Gothic" pitchFamily="34" charset="-122"/>
                 <a:cs typeface="Yu Gothic" pitchFamily="34" charset="-120"/>
               </a:rPr>
-              <a:t>PART 3  ─  執筆型の決定（浦木メソッド）</a:t>
+              <a:t>PART 3  ─  執筆型の決定（浦木麻子 准教授 考案）</a:t>
             </a:r>
             <a:endParaRPr lang="en-US" sz="1200" dirty="0"/>
           </a:p>
@@ -36904,7 +36904,7 @@
                 <a:ea typeface="Yu Gothic" pitchFamily="34" charset="-122"/>
                 <a:cs typeface="Yu Gothic" pitchFamily="34" charset="-120"/>
               </a:rPr>
-              <a:t>E 閉世界の論理（18・7文法／浦木・v2新設）：</a:t>
+              <a:t>E 閉世界の論理（18・7文法／浦木麻子准教授・v2新設）：</a:t>
             </a:r>
             <a:endParaRPr lang="en-US" sz="1050" dirty="0"/>
           </a:p>
@@ -40689,7 +40689,7 @@
                           <a:ea typeface="Yu Gothic" pitchFamily="34" charset="-122"/>
                           <a:cs typeface="Yu Gothic" pitchFamily="34" charset="-120"/>
                         </a:rPr>
-                        <a:t>浦木メソッド（7文法・箱テンプレ）を収録</a:t>
+                        <a:t>浦木麻子准教授の7文法・箱テンプレを収録</a:t>
                       </a:r>
                       <a:endParaRPr lang="en-US" sz="950" dirty="0">
                         <a:latin typeface="Yu Gothic" charset="0"/>
